--- a/SeedLMPresentation.pptx
+++ b/SeedLMPresentation.pptx
@@ -6939,7 +6939,27 @@
                 <a:cs typeface="Arial"/>
                 <a:sym typeface="Arial"/>
               </a:rPr>
-              <a:t>Источник: статья, с. 7 · §4, §4.1</a:t>
+              <a:t>Источник: статья, с. 7</a:t>
+            </a:r>
+            <a:r>
+              <a:rPr lang="en-US" sz="1020">
+                <a:solidFill>
+                  <a:srgbClr val="666273"/>
+                </a:solidFill>
+              </a:rPr>
+              <a:t>, параграф </a:t>
+            </a:r>
+            <a:r>
+              <a:rPr b="0" i="0" lang="en-US" sz="1020" u="none" cap="none" strike="noStrike">
+                <a:solidFill>
+                  <a:srgbClr val="666273"/>
+                </a:solidFill>
+                <a:latin typeface="Arial"/>
+                <a:ea typeface="Arial"/>
+                <a:cs typeface="Arial"/>
+                <a:sym typeface="Arial"/>
+              </a:rPr>
+              <a:t>4.1</a:t>
             </a:r>
             <a:endParaRPr b="0" i="0" sz="1020" u="none" cap="none" strike="noStrike">
               <a:solidFill>
@@ -8390,7 +8410,27 @@
                 <a:cs typeface="Arial"/>
                 <a:sym typeface="Arial"/>
               </a:rPr>
-              <a:t>Источник: статья, с. 7 · таблица 2</a:t>
+              <a:t>Источник: статья, с. 7</a:t>
+            </a:r>
+            <a:r>
+              <a:rPr lang="en-US" sz="1020">
+                <a:solidFill>
+                  <a:srgbClr val="666273"/>
+                </a:solidFill>
+              </a:rPr>
+              <a:t>, </a:t>
+            </a:r>
+            <a:r>
+              <a:rPr b="0" i="0" lang="en-US" sz="1020" u="none" cap="none" strike="noStrike">
+                <a:solidFill>
+                  <a:srgbClr val="666273"/>
+                </a:solidFill>
+                <a:latin typeface="Arial"/>
+                <a:ea typeface="Arial"/>
+                <a:cs typeface="Arial"/>
+                <a:sym typeface="Arial"/>
+              </a:rPr>
+              <a:t>таблица 2</a:t>
             </a:r>
             <a:endParaRPr b="0" i="0" sz="1020" u="none" cap="none" strike="noStrike">
               <a:solidFill>
@@ -13137,7 +13177,7 @@
                 <a:cs typeface="Arial"/>
                 <a:sym typeface="Arial"/>
               </a:rPr>
-              <a:t>4.2. Аппаратная реализация: FPGA</a:t>
+              <a:t>4.2. Аппаратная реализация FPGA</a:t>
             </a:r>
             <a:endParaRPr b="0" i="0" sz="2250" u="none" cap="none" strike="noStrike">
               <a:solidFill>
